--- a/courses/learn_clustering/module02-01-label-propagation/slides.pptx
+++ b/courses/learn_clustering/module02-01-label-propagation/slides.pptx
@@ -515,12 +515,6 @@
               <a:t>Label propagation grows communities by letting each node adopt the strongest neighbor label. You’ll watch the asynchronous update on the tiny graph, then measure iterations-to-stable and cutsize.</a:t>
             </a:r>
           </a:p>
-          <a:p/>
-          <a:p>
-            <a:r>
-              <a:t>&lt;!-- algorithm-walkthrough --&gt;</a:t>
-            </a:r>
-          </a:p>
         </p:txBody>
       </p:sp>
       <p:sp>
@@ -939,12 +933,6 @@
           <a:p>
             <a:r>
               <a:t>LP is a cheap community detector—great as a seed or coarsening hint. It does not enforce balance or timing; refinement still matters on hard instances.</a:t>
-            </a:r>
-          </a:p>
-          <a:p/>
-          <a:p>
-            <a:r>
-              <a:t>&lt;!-- /algorithm-walkthrough --&gt;</a:t>
             </a:r>
           </a:p>
         </p:txBody>
@@ -5815,7 +5803,7 @@
                 <a:spcPts val="2200"/>
               </a:lnSpc>
               <a:spcAft>
-                <a:spcPts val="600"/>
+                <a:spcPts val="400"/>
               </a:spcAft>
             </a:pPr>
             <a:r>
@@ -5834,7 +5822,7 @@
                 <a:spcPts val="2200"/>
               </a:lnSpc>
               <a:spcAft>
-                <a:spcPts val="600"/>
+                <a:spcPts val="400"/>
               </a:spcAft>
             </a:pPr>
             <a:r>
@@ -5853,26 +5841,7 @@
                 <a:spcPts val="2200"/>
               </a:lnSpc>
               <a:spcAft>
-                <a:spcPts val="600"/>
-              </a:spcAft>
-            </a:pPr>
-            <a:r>
-              <a:rPr sz="2000" b="0">
-                <a:solidFill>
-                  <a:srgbClr val="333333"/>
-                </a:solidFill>
-                <a:latin typeface="Consolas"/>
-              </a:rPr>
-              <a:t/>
-            </a:r>
-          </a:p>
-          <a:p>
-            <a:pPr>
-              <a:lnSpc>
-                <a:spcPts val="2200"/>
-              </a:lnSpc>
-              <a:spcAft>
-                <a:spcPts val="600"/>
+                <a:spcPts val="400"/>
               </a:spcAft>
             </a:pPr>
             <a:r>
